--- a/.lessons/56 Category, Subcategory and Child Category Setup/4 Category- Show data in index page/1.pptx
+++ b/.lessons/56 Category, Subcategory and Child Category Setup/4 Category- Show data in index page/1.pptx
@@ -7,7 +7,11 @@
   <p:sldIdLst>
     <p:sldId id="413" r:id="rId2"/>
     <p:sldId id="414" r:id="rId3"/>
-    <p:sldId id="400" r:id="rId4"/>
+    <p:sldId id="415" r:id="rId4"/>
+    <p:sldId id="400" r:id="rId5"/>
+    <p:sldId id="416" r:id="rId6"/>
+    <p:sldId id="417" r:id="rId7"/>
+    <p:sldId id="418" r:id="rId8"/>
   </p:sldIdLst>
   <p:sldSz cx="12192000" cy="6858000"/>
   <p:notesSz cx="6858000" cy="9144000"/>
@@ -261,7 +265,7 @@
           <a:p>
             <a:fld id="{3E102D2E-813C-461C-9963-687A650C48C0}" type="datetimeFigureOut">
               <a:rPr lang="en-US" smtClean="0"/>
-              <a:t>6/26/2025</a:t>
+              <a:t>8/18/2025</a:t>
             </a:fld>
             <a:endParaRPr lang="en-US"/>
           </a:p>
@@ -459,7 +463,7 @@
           <a:p>
             <a:fld id="{3E102D2E-813C-461C-9963-687A650C48C0}" type="datetimeFigureOut">
               <a:rPr lang="en-US" smtClean="0"/>
-              <a:t>6/26/2025</a:t>
+              <a:t>8/18/2025</a:t>
             </a:fld>
             <a:endParaRPr lang="en-US"/>
           </a:p>
@@ -667,7 +671,7 @@
           <a:p>
             <a:fld id="{3E102D2E-813C-461C-9963-687A650C48C0}" type="datetimeFigureOut">
               <a:rPr lang="en-US" smtClean="0"/>
-              <a:t>6/26/2025</a:t>
+              <a:t>8/18/2025</a:t>
             </a:fld>
             <a:endParaRPr lang="en-US"/>
           </a:p>
@@ -865,7 +869,7 @@
           <a:p>
             <a:fld id="{3E102D2E-813C-461C-9963-687A650C48C0}" type="datetimeFigureOut">
               <a:rPr lang="en-US" smtClean="0"/>
-              <a:t>6/26/2025</a:t>
+              <a:t>8/18/2025</a:t>
             </a:fld>
             <a:endParaRPr lang="en-US"/>
           </a:p>
@@ -1140,7 +1144,7 @@
           <a:p>
             <a:fld id="{3E102D2E-813C-461C-9963-687A650C48C0}" type="datetimeFigureOut">
               <a:rPr lang="en-US" smtClean="0"/>
-              <a:t>6/26/2025</a:t>
+              <a:t>8/18/2025</a:t>
             </a:fld>
             <a:endParaRPr lang="en-US"/>
           </a:p>
@@ -1405,7 +1409,7 @@
           <a:p>
             <a:fld id="{3E102D2E-813C-461C-9963-687A650C48C0}" type="datetimeFigureOut">
               <a:rPr lang="en-US" smtClean="0"/>
-              <a:t>6/26/2025</a:t>
+              <a:t>8/18/2025</a:t>
             </a:fld>
             <a:endParaRPr lang="en-US"/>
           </a:p>
@@ -1817,7 +1821,7 @@
           <a:p>
             <a:fld id="{3E102D2E-813C-461C-9963-687A650C48C0}" type="datetimeFigureOut">
               <a:rPr lang="en-US" smtClean="0"/>
-              <a:t>6/26/2025</a:t>
+              <a:t>8/18/2025</a:t>
             </a:fld>
             <a:endParaRPr lang="en-US"/>
           </a:p>
@@ -1958,7 +1962,7 @@
           <a:p>
             <a:fld id="{3E102D2E-813C-461C-9963-687A650C48C0}" type="datetimeFigureOut">
               <a:rPr lang="en-US" smtClean="0"/>
-              <a:t>6/26/2025</a:t>
+              <a:t>8/18/2025</a:t>
             </a:fld>
             <a:endParaRPr lang="en-US"/>
           </a:p>
@@ -2071,7 +2075,7 @@
           <a:p>
             <a:fld id="{3E102D2E-813C-461C-9963-687A650C48C0}" type="datetimeFigureOut">
               <a:rPr lang="en-US" smtClean="0"/>
-              <a:t>6/26/2025</a:t>
+              <a:t>8/18/2025</a:t>
             </a:fld>
             <a:endParaRPr lang="en-US"/>
           </a:p>
@@ -2382,7 +2386,7 @@
           <a:p>
             <a:fld id="{3E102D2E-813C-461C-9963-687A650C48C0}" type="datetimeFigureOut">
               <a:rPr lang="en-US" smtClean="0"/>
-              <a:t>6/26/2025</a:t>
+              <a:t>8/18/2025</a:t>
             </a:fld>
             <a:endParaRPr lang="en-US"/>
           </a:p>
@@ -2670,7 +2674,7 @@
           <a:p>
             <a:fld id="{3E102D2E-813C-461C-9963-687A650C48C0}" type="datetimeFigureOut">
               <a:rPr lang="en-US" smtClean="0"/>
-              <a:t>6/26/2025</a:t>
+              <a:t>8/18/2025</a:t>
             </a:fld>
             <a:endParaRPr lang="en-US"/>
           </a:p>
@@ -2911,7 +2915,7 @@
           <a:p>
             <a:fld id="{3E102D2E-813C-461C-9963-687A650C48C0}" type="datetimeFigureOut">
               <a:rPr lang="en-US" smtClean="0"/>
-              <a:t>6/26/2025</a:t>
+              <a:t>8/18/2025</a:t>
             </a:fld>
             <a:endParaRPr lang="en-US"/>
           </a:p>
@@ -3369,21 +3373,108 @@
               <a:buNone/>
             </a:pPr>
             <a:r>
-              <a:rPr kumimoji="0" lang="en-US" altLang="en-US" sz="1300" b="0" i="0" u="none" strike="noStrike" cap="none" normalizeH="0" baseline="0">
-                <a:ln>
-                  <a:noFill/>
-                </a:ln>
-                <a:solidFill>
-                  <a:schemeClr val="tx1"/>
-                </a:solidFill>
-                <a:effectLst/>
+              <a:rPr lang="en-US" altLang="en-US" sz="1300" b="1">
                 <a:latin typeface="Arial" panose="020B0604020202020204" pitchFamily="34" charset="0"/>
               </a:rPr>
-              <a:t>.</a:t>
-            </a:r>
-          </a:p>
-        </p:txBody>
-      </p:sp>
+              <a:t>app\DataTables\</a:t>
+            </a:r>
+            <a:r>
+              <a:rPr lang="en-US" altLang="en-US" sz="1300" b="1" u="sng">
+                <a:latin typeface="Arial" panose="020B0604020202020204" pitchFamily="34" charset="0"/>
+              </a:rPr>
+              <a:t>CategoryDataTable.php</a:t>
+            </a:r>
+            <a:r>
+              <a:rPr lang="en-US" altLang="en-US" sz="1300" b="1">
+                <a:latin typeface="Arial" panose="020B0604020202020204" pitchFamily="34" charset="0"/>
+              </a:rPr>
+              <a:t> </a:t>
+            </a:r>
+            <a:r>
+              <a:rPr lang="az-Latn-AZ" altLang="en-US" sz="1300">
+                <a:latin typeface="Arial" panose="020B0604020202020204" pitchFamily="34" charset="0"/>
+              </a:rPr>
+              <a:t>faylında dəyişikliklər edərək </a:t>
+            </a:r>
+            <a:r>
+              <a:rPr lang="en-US" altLang="en-US" sz="1300" b="1">
+                <a:latin typeface="Arial" panose="020B0604020202020204" pitchFamily="34" charset="0"/>
+              </a:rPr>
+              <a:t>resources\views\admin\category\</a:t>
+            </a:r>
+            <a:r>
+              <a:rPr lang="en-US" altLang="en-US" sz="1300" b="1" u="sng">
+                <a:latin typeface="Arial" panose="020B0604020202020204" pitchFamily="34" charset="0"/>
+              </a:rPr>
+              <a:t>create.blade.php</a:t>
+            </a:r>
+            <a:r>
+              <a:rPr lang="az-Latn-AZ" altLang="en-US" sz="1300" b="1">
+                <a:latin typeface="Arial" panose="020B0604020202020204" pitchFamily="34" charset="0"/>
+              </a:rPr>
+              <a:t> </a:t>
+            </a:r>
+            <a:r>
+              <a:rPr lang="az-Latn-AZ" altLang="en-US" sz="1300">
+                <a:latin typeface="Arial" panose="020B0604020202020204" pitchFamily="34" charset="0"/>
+              </a:rPr>
+              <a:t>faylında</a:t>
+            </a:r>
+            <a:r>
+              <a:rPr lang="en-US" altLang="en-US" sz="1300">
+                <a:latin typeface="Arial" panose="020B0604020202020204" pitchFamily="34" charset="0"/>
+              </a:rPr>
+              <a:t> </a:t>
+            </a:r>
+            <a:r>
+              <a:rPr lang="az-Latn-AZ" altLang="en-US" sz="1300">
+                <a:latin typeface="Arial" panose="020B0604020202020204" pitchFamily="34" charset="0"/>
+              </a:rPr>
+              <a:t>əks etdiririk.</a:t>
+            </a:r>
+            <a:endParaRPr kumimoji="0" lang="en-US" altLang="en-US" sz="1300" b="0" i="0" u="none" strike="noStrike" cap="none" normalizeH="0" baseline="0">
+              <a:ln>
+                <a:noFill/>
+              </a:ln>
+              <a:solidFill>
+                <a:schemeClr val="tx1"/>
+              </a:solidFill>
+              <a:effectLst/>
+              <a:latin typeface="Arial" panose="020B0604020202020204" pitchFamily="34" charset="0"/>
+            </a:endParaRPr>
+          </a:p>
+        </p:txBody>
+      </p:sp>
+      <p:pic>
+        <p:nvPicPr>
+          <p:cNvPr id="6" name="Picture 5">
+            <a:extLst>
+              <a:ext uri="{FF2B5EF4-FFF2-40B4-BE49-F238E27FC236}">
+                <a16:creationId xmlns:a16="http://schemas.microsoft.com/office/drawing/2014/main" id="{2599B9E9-0CD8-FCB2-F609-AFFEC5C3C703}"/>
+              </a:ext>
+            </a:extLst>
+          </p:cNvPr>
+          <p:cNvPicPr>
+            <a:picLocks noChangeAspect="1"/>
+          </p:cNvPicPr>
+          <p:nvPr/>
+        </p:nvPicPr>
+        <p:blipFill>
+          <a:blip r:embed="rId2"/>
+          <a:stretch>
+            <a:fillRect/>
+          </a:stretch>
+        </p:blipFill>
+        <p:spPr>
+          <a:xfrm>
+            <a:off x="4858327" y="865552"/>
+            <a:ext cx="7333673" cy="5992447"/>
+          </a:xfrm>
+          <a:prstGeom prst="rect">
+            <a:avLst/>
+          </a:prstGeom>
+        </p:spPr>
+      </p:pic>
     </p:spTree>
     <p:extLst>
       <p:ext uri="{BB962C8B-B14F-4D97-AF65-F5344CB8AC3E}">
@@ -3455,21 +3546,60 @@
               <a:buNone/>
             </a:pPr>
             <a:r>
-              <a:rPr kumimoji="0" lang="en-US" altLang="en-US" sz="1300" b="0" i="0" u="none" strike="noStrike" cap="none" normalizeH="0" baseline="0">
-                <a:ln>
-                  <a:noFill/>
-                </a:ln>
-                <a:solidFill>
-                  <a:schemeClr val="tx1"/>
-                </a:solidFill>
-                <a:effectLst/>
+              <a:rPr lang="az-Latn-AZ" altLang="en-US" sz="1300" b="1">
                 <a:latin typeface="Arial" panose="020B0604020202020204" pitchFamily="34" charset="0"/>
               </a:rPr>
-              <a:t>.</a:t>
-            </a:r>
-          </a:p>
-        </p:txBody>
-      </p:sp>
+              <a:t>orderBy(0)</a:t>
+            </a:r>
+            <a:r>
+              <a:rPr lang="az-Latn-AZ" altLang="en-US" sz="1300">
+                <a:latin typeface="Arial" panose="020B0604020202020204" pitchFamily="34" charset="0"/>
+              </a:rPr>
+              <a:t> metodunda 0 (sıfır) yazaraq sıralamanı dəyişdiririk.  </a:t>
+            </a:r>
+            <a:endParaRPr kumimoji="0" lang="en-US" altLang="en-US" sz="1300" b="0" i="0" u="none" strike="noStrike" cap="none" normalizeH="0" baseline="0">
+              <a:ln>
+                <a:noFill/>
+              </a:ln>
+              <a:solidFill>
+                <a:schemeClr val="tx1"/>
+              </a:solidFill>
+              <a:effectLst/>
+              <a:latin typeface="Arial" panose="020B0604020202020204" pitchFamily="34" charset="0"/>
+            </a:endParaRPr>
+          </a:p>
+        </p:txBody>
+      </p:sp>
+      <p:pic>
+        <p:nvPicPr>
+          <p:cNvPr id="4" name="Picture 3">
+            <a:extLst>
+              <a:ext uri="{FF2B5EF4-FFF2-40B4-BE49-F238E27FC236}">
+                <a16:creationId xmlns:a16="http://schemas.microsoft.com/office/drawing/2014/main" id="{ECD41597-A775-F6F8-2F97-7660E078690D}"/>
+              </a:ext>
+            </a:extLst>
+          </p:cNvPr>
+          <p:cNvPicPr>
+            <a:picLocks noChangeAspect="1"/>
+          </p:cNvPicPr>
+          <p:nvPr/>
+        </p:nvPicPr>
+        <p:blipFill>
+          <a:blip r:embed="rId2"/>
+          <a:stretch>
+            <a:fillRect/>
+          </a:stretch>
+        </p:blipFill>
+        <p:spPr>
+          <a:xfrm>
+            <a:off x="7565852" y="0"/>
+            <a:ext cx="4626148" cy="6858000"/>
+          </a:xfrm>
+          <a:prstGeom prst="rect">
+            <a:avLst/>
+          </a:prstGeom>
+        </p:spPr>
+      </p:pic>
     </p:spTree>
     <p:extLst>
       <p:ext uri="{BB962C8B-B14F-4D97-AF65-F5344CB8AC3E}">
@@ -3484,6 +3614,207 @@
 </file>
 
 <file path=ppt/slides/slide3.xml><?xml version="1.0" encoding="utf-8"?>
+<p:sld xmlns:a="http://schemas.openxmlformats.org/drawingml/2006/main" xmlns:r="http://schemas.openxmlformats.org/officeDocument/2006/relationships" xmlns:p="http://schemas.openxmlformats.org/presentationml/2006/main">
+  <p:cSld>
+    <p:spTree>
+      <p:nvGrpSpPr>
+        <p:cNvPr id="1" name="">
+          <a:extLst>
+            <a:ext uri="{FF2B5EF4-FFF2-40B4-BE49-F238E27FC236}">
+              <a16:creationId xmlns:a16="http://schemas.microsoft.com/office/drawing/2014/main" id="{37703276-F704-9816-5576-A8F7BCDE59AA}"/>
+            </a:ext>
+          </a:extLst>
+        </p:cNvPr>
+        <p:cNvGrpSpPr/>
+        <p:nvPr/>
+      </p:nvGrpSpPr>
+      <p:grpSpPr>
+        <a:xfrm>
+          <a:off x="0" y="0"/>
+          <a:ext cx="0" cy="0"/>
+          <a:chOff x="0" y="0"/>
+          <a:chExt cx="0" cy="0"/>
+        </a:xfrm>
+      </p:grpSpPr>
+      <p:sp>
+        <p:nvSpPr>
+          <p:cNvPr id="3" name="TextBox 2">
+            <a:extLst>
+              <a:ext uri="{FF2B5EF4-FFF2-40B4-BE49-F238E27FC236}">
+                <a16:creationId xmlns:a16="http://schemas.microsoft.com/office/drawing/2014/main" id="{59F0BA20-4E84-87D1-01FE-9271ED4AD9B6}"/>
+              </a:ext>
+            </a:extLst>
+          </p:cNvPr>
+          <p:cNvSpPr txBox="1"/>
+          <p:nvPr/>
+        </p:nvSpPr>
+        <p:spPr>
+          <a:xfrm>
+            <a:off x="217714" y="255046"/>
+            <a:ext cx="11756571" cy="955518"/>
+          </a:xfrm>
+          <a:prstGeom prst="rect">
+            <a:avLst/>
+          </a:prstGeom>
+          <a:noFill/>
+        </p:spPr>
+        <p:txBody>
+          <a:bodyPr wrap="square">
+            <a:spAutoFit/>
+          </a:bodyPr>
+          <a:lstStyle/>
+          <a:p>
+            <a:pPr>
+              <a:lnSpc>
+                <a:spcPct val="150000"/>
+              </a:lnSpc>
+              <a:buNone/>
+            </a:pPr>
+            <a:r>
+              <a:rPr lang="az-Latn-AZ" altLang="en-US" sz="1300">
+                <a:latin typeface="Arial" panose="020B0604020202020204" pitchFamily="34" charset="0"/>
+              </a:rPr>
+              <a:t>Nəticə belədir hal-hazırda. </a:t>
+            </a:r>
+          </a:p>
+          <a:p>
+            <a:pPr>
+              <a:lnSpc>
+                <a:spcPct val="150000"/>
+              </a:lnSpc>
+              <a:buNone/>
+            </a:pPr>
+            <a:endParaRPr kumimoji="0" lang="az-Latn-AZ" altLang="en-US" sz="1300" b="0" i="0" u="none" strike="noStrike" cap="none" normalizeH="0" baseline="0">
+              <a:ln>
+                <a:noFill/>
+              </a:ln>
+              <a:solidFill>
+                <a:schemeClr val="tx1"/>
+              </a:solidFill>
+              <a:effectLst/>
+              <a:latin typeface="Arial" panose="020B0604020202020204" pitchFamily="34" charset="0"/>
+            </a:endParaRPr>
+          </a:p>
+          <a:p>
+            <a:pPr>
+              <a:lnSpc>
+                <a:spcPct val="150000"/>
+              </a:lnSpc>
+              <a:buNone/>
+            </a:pPr>
+            <a:r>
+              <a:rPr lang="az-Latn-AZ" altLang="en-US" sz="1300">
+                <a:latin typeface="Arial" panose="020B0604020202020204" pitchFamily="34" charset="0"/>
+              </a:rPr>
+              <a:t>İşarətlənən hissədə </a:t>
+            </a:r>
+            <a:r>
+              <a:rPr lang="az-Latn-AZ" altLang="en-US" sz="1300" b="1">
+                <a:latin typeface="Arial" panose="020B0604020202020204" pitchFamily="34" charset="0"/>
+              </a:rPr>
+              <a:t>status</a:t>
+            </a:r>
+            <a:r>
+              <a:rPr lang="az-Latn-AZ" altLang="en-US" sz="1300">
+                <a:latin typeface="Arial" panose="020B0604020202020204" pitchFamily="34" charset="0"/>
+              </a:rPr>
+              <a:t> dəyəri olacaq. Statusu </a:t>
+            </a:r>
+            <a:r>
+              <a:rPr lang="az-Latn-AZ" altLang="en-US" sz="1300" b="1">
+                <a:latin typeface="Arial" panose="020B0604020202020204" pitchFamily="34" charset="0"/>
+              </a:rPr>
+              <a:t>checkbox</a:t>
+            </a:r>
+            <a:r>
+              <a:rPr lang="az-Latn-AZ" altLang="en-US" sz="1300">
+                <a:latin typeface="Arial" panose="020B0604020202020204" pitchFamily="34" charset="0"/>
+              </a:rPr>
+              <a:t> kimi edəcəyik ki, </a:t>
+            </a:r>
+            <a:r>
+              <a:rPr lang="az-Latn-AZ" altLang="en-US" sz="1300" b="1">
+                <a:latin typeface="Arial" panose="020B0604020202020204" pitchFamily="34" charset="0"/>
+              </a:rPr>
+              <a:t>açıb-qapada</a:t>
+            </a:r>
+            <a:r>
+              <a:rPr lang="az-Latn-AZ" altLang="en-US" sz="1300">
+                <a:latin typeface="Arial" panose="020B0604020202020204" pitchFamily="34" charset="0"/>
+              </a:rPr>
+              <a:t> bilək.</a:t>
+            </a:r>
+            <a:endParaRPr kumimoji="0" lang="en-US" altLang="en-US" sz="1300" b="0" i="0" u="none" strike="noStrike" cap="none" normalizeH="0" baseline="0">
+              <a:ln>
+                <a:noFill/>
+              </a:ln>
+              <a:solidFill>
+                <a:schemeClr val="tx1"/>
+              </a:solidFill>
+              <a:effectLst/>
+              <a:latin typeface="Arial" panose="020B0604020202020204" pitchFamily="34" charset="0"/>
+            </a:endParaRPr>
+          </a:p>
+        </p:txBody>
+      </p:sp>
+      <p:pic>
+        <p:nvPicPr>
+          <p:cNvPr id="4" name="Picture 3">
+            <a:extLst>
+              <a:ext uri="{FF2B5EF4-FFF2-40B4-BE49-F238E27FC236}">
+                <a16:creationId xmlns:a16="http://schemas.microsoft.com/office/drawing/2014/main" id="{BAB1CD49-F6F9-6A20-EAB9-0365B4EF354E}"/>
+              </a:ext>
+            </a:extLst>
+          </p:cNvPr>
+          <p:cNvPicPr>
+            <a:picLocks noChangeAspect="1"/>
+          </p:cNvPicPr>
+          <p:nvPr/>
+        </p:nvPicPr>
+        <p:blipFill>
+          <a:blip r:embed="rId2"/>
+          <a:stretch>
+            <a:fillRect/>
+          </a:stretch>
+        </p:blipFill>
+        <p:spPr>
+          <a:xfrm>
+            <a:off x="0" y="2849062"/>
+            <a:ext cx="12192000" cy="4008938"/>
+          </a:xfrm>
+          <a:prstGeom prst="rect">
+            <a:avLst/>
+          </a:prstGeom>
+          <a:ln w="38100" cap="sq">
+            <a:solidFill>
+              <a:srgbClr val="000000"/>
+            </a:solidFill>
+            <a:prstDash val="solid"/>
+            <a:miter lim="800000"/>
+          </a:ln>
+          <a:effectLst>
+            <a:outerShdw blurRad="50800" dist="38100" dir="2700000" algn="tl" rotWithShape="0">
+              <a:srgbClr val="000000">
+                <a:alpha val="43000"/>
+              </a:srgbClr>
+            </a:outerShdw>
+          </a:effectLst>
+        </p:spPr>
+      </p:pic>
+    </p:spTree>
+    <p:extLst>
+      <p:ext uri="{BB962C8B-B14F-4D97-AF65-F5344CB8AC3E}">
+        <p14:creationId xmlns:p14="http://schemas.microsoft.com/office/powerpoint/2010/main" val="1396108026"/>
+      </p:ext>
+    </p:extLst>
+  </p:cSld>
+  <p:clrMapOvr>
+    <a:masterClrMapping/>
+  </p:clrMapOvr>
+</p:sld>
+</file>
+
+<file path=ppt/slides/slide4.xml><?xml version="1.0" encoding="utf-8"?>
 <p:sld xmlns:a="http://schemas.openxmlformats.org/drawingml/2006/main" xmlns:r="http://schemas.openxmlformats.org/officeDocument/2006/relationships" xmlns:p="http://schemas.openxmlformats.org/presentationml/2006/main">
   <p:cSld>
     <p:spTree>
@@ -3541,6 +3872,270 @@
               <a:buNone/>
             </a:pPr>
             <a:r>
+              <a:rPr lang="az-Latn-AZ" altLang="en-US" sz="1300" b="1">
+                <a:latin typeface="Arial" panose="020B0604020202020204" pitchFamily="34" charset="0"/>
+              </a:rPr>
+              <a:t>Checkbox</a:t>
+            </a:r>
+            <a:r>
+              <a:rPr lang="az-Latn-AZ" altLang="en-US" sz="1300">
+                <a:latin typeface="Arial" panose="020B0604020202020204" pitchFamily="34" charset="0"/>
+              </a:rPr>
+              <a:t> üçün işarətlənən elementi götürürük.</a:t>
+            </a:r>
+            <a:endParaRPr kumimoji="0" lang="en-US" altLang="en-US" sz="1300" b="0" i="0" u="none" strike="noStrike" cap="none" normalizeH="0" baseline="0">
+              <a:ln>
+                <a:noFill/>
+              </a:ln>
+              <a:solidFill>
+                <a:schemeClr val="tx1"/>
+              </a:solidFill>
+              <a:effectLst/>
+              <a:latin typeface="Arial" panose="020B0604020202020204" pitchFamily="34" charset="0"/>
+            </a:endParaRPr>
+          </a:p>
+        </p:txBody>
+      </p:sp>
+      <p:pic>
+        <p:nvPicPr>
+          <p:cNvPr id="4" name="Picture 3">
+            <a:extLst>
+              <a:ext uri="{FF2B5EF4-FFF2-40B4-BE49-F238E27FC236}">
+                <a16:creationId xmlns:a16="http://schemas.microsoft.com/office/drawing/2014/main" id="{2392930E-C4A7-E3BD-0DBA-BDB54BE69803}"/>
+              </a:ext>
+            </a:extLst>
+          </p:cNvPr>
+          <p:cNvPicPr>
+            <a:picLocks noChangeAspect="1"/>
+          </p:cNvPicPr>
+          <p:nvPr/>
+        </p:nvPicPr>
+        <p:blipFill>
+          <a:blip r:embed="rId2"/>
+          <a:stretch>
+            <a:fillRect/>
+          </a:stretch>
+        </p:blipFill>
+        <p:spPr>
+          <a:xfrm>
+            <a:off x="1413163" y="1269182"/>
+            <a:ext cx="10778835" cy="5588818"/>
+          </a:xfrm>
+          <a:prstGeom prst="rect">
+            <a:avLst/>
+          </a:prstGeom>
+          <a:ln w="38100" cap="sq">
+            <a:solidFill>
+              <a:srgbClr val="000000"/>
+            </a:solidFill>
+            <a:prstDash val="solid"/>
+            <a:miter lim="800000"/>
+          </a:ln>
+          <a:effectLst>
+            <a:outerShdw blurRad="50800" dist="38100" dir="2700000" algn="tl" rotWithShape="0">
+              <a:srgbClr val="000000">
+                <a:alpha val="43000"/>
+              </a:srgbClr>
+            </a:outerShdw>
+          </a:effectLst>
+        </p:spPr>
+      </p:pic>
+    </p:spTree>
+    <p:extLst>
+      <p:ext uri="{BB962C8B-B14F-4D97-AF65-F5344CB8AC3E}">
+        <p14:creationId xmlns:p14="http://schemas.microsoft.com/office/powerpoint/2010/main" val="3095838342"/>
+      </p:ext>
+    </p:extLst>
+  </p:cSld>
+  <p:clrMapOvr>
+    <a:masterClrMapping/>
+  </p:clrMapOvr>
+</p:sld>
+</file>
+
+<file path=ppt/slides/slide5.xml><?xml version="1.0" encoding="utf-8"?>
+<p:sld xmlns:a="http://schemas.openxmlformats.org/drawingml/2006/main" xmlns:r="http://schemas.openxmlformats.org/officeDocument/2006/relationships" xmlns:p="http://schemas.openxmlformats.org/presentationml/2006/main">
+  <p:cSld>
+    <p:spTree>
+      <p:nvGrpSpPr>
+        <p:cNvPr id="1" name="">
+          <a:extLst>
+            <a:ext uri="{FF2B5EF4-FFF2-40B4-BE49-F238E27FC236}">
+              <a16:creationId xmlns:a16="http://schemas.microsoft.com/office/drawing/2014/main" id="{56A6F700-B56A-3B16-B8A7-0B0C2B26770F}"/>
+            </a:ext>
+          </a:extLst>
+        </p:cNvPr>
+        <p:cNvGrpSpPr/>
+        <p:nvPr/>
+      </p:nvGrpSpPr>
+      <p:grpSpPr>
+        <a:xfrm>
+          <a:off x="0" y="0"/>
+          <a:ext cx="0" cy="0"/>
+          <a:chOff x="0" y="0"/>
+          <a:chExt cx="0" cy="0"/>
+        </a:xfrm>
+      </p:grpSpPr>
+      <p:sp>
+        <p:nvSpPr>
+          <p:cNvPr id="3" name="TextBox 2">
+            <a:extLst>
+              <a:ext uri="{FF2B5EF4-FFF2-40B4-BE49-F238E27FC236}">
+                <a16:creationId xmlns:a16="http://schemas.microsoft.com/office/drawing/2014/main" id="{099F8E24-5B06-DF02-97D2-51DFCE48DF80}"/>
+              </a:ext>
+            </a:extLst>
+          </p:cNvPr>
+          <p:cNvSpPr txBox="1"/>
+          <p:nvPr/>
+        </p:nvSpPr>
+        <p:spPr>
+          <a:xfrm>
+            <a:off x="217714" y="255046"/>
+            <a:ext cx="11756571" cy="355354"/>
+          </a:xfrm>
+          <a:prstGeom prst="rect">
+            <a:avLst/>
+          </a:prstGeom>
+          <a:noFill/>
+        </p:spPr>
+        <p:txBody>
+          <a:bodyPr wrap="square">
+            <a:spAutoFit/>
+          </a:bodyPr>
+          <a:lstStyle/>
+          <a:p>
+            <a:pPr>
+              <a:lnSpc>
+                <a:spcPct val="150000"/>
+              </a:lnSpc>
+              <a:buNone/>
+            </a:pPr>
+            <a:r>
+              <a:rPr lang="az-Latn-AZ" altLang="en-US" sz="1300" b="1">
+                <a:latin typeface="Arial" panose="020B0604020202020204" pitchFamily="34" charset="0"/>
+              </a:rPr>
+              <a:t>CategoryDataTable.php </a:t>
+            </a:r>
+            <a:r>
+              <a:rPr lang="az-Latn-AZ" altLang="en-US" sz="1300">
+                <a:latin typeface="Arial" panose="020B0604020202020204" pitchFamily="34" charset="0"/>
+              </a:rPr>
+              <a:t>faylına yazırıq.</a:t>
+            </a:r>
+            <a:endParaRPr kumimoji="0" lang="en-US" altLang="en-US" sz="1300" b="0" i="0" u="none" strike="noStrike" cap="none" normalizeH="0" baseline="0">
+              <a:ln>
+                <a:noFill/>
+              </a:ln>
+              <a:solidFill>
+                <a:schemeClr val="tx1"/>
+              </a:solidFill>
+              <a:effectLst/>
+              <a:latin typeface="Arial" panose="020B0604020202020204" pitchFamily="34" charset="0"/>
+            </a:endParaRPr>
+          </a:p>
+        </p:txBody>
+      </p:sp>
+      <p:pic>
+        <p:nvPicPr>
+          <p:cNvPr id="4" name="Picture 3">
+            <a:extLst>
+              <a:ext uri="{FF2B5EF4-FFF2-40B4-BE49-F238E27FC236}">
+                <a16:creationId xmlns:a16="http://schemas.microsoft.com/office/drawing/2014/main" id="{C97F3D0E-6013-47B3-1FB9-8DACD8107BC1}"/>
+              </a:ext>
+            </a:extLst>
+          </p:cNvPr>
+          <p:cNvPicPr>
+            <a:picLocks noChangeAspect="1"/>
+          </p:cNvPicPr>
+          <p:nvPr/>
+        </p:nvPicPr>
+        <p:blipFill>
+          <a:blip r:embed="rId2"/>
+          <a:stretch>
+            <a:fillRect/>
+          </a:stretch>
+        </p:blipFill>
+        <p:spPr>
+          <a:xfrm>
+            <a:off x="5560088" y="0"/>
+            <a:ext cx="6631912" cy="6858000"/>
+          </a:xfrm>
+          <a:prstGeom prst="rect">
+            <a:avLst/>
+          </a:prstGeom>
+        </p:spPr>
+      </p:pic>
+    </p:spTree>
+    <p:extLst>
+      <p:ext uri="{BB962C8B-B14F-4D97-AF65-F5344CB8AC3E}">
+        <p14:creationId xmlns:p14="http://schemas.microsoft.com/office/powerpoint/2010/main" val="4077652970"/>
+      </p:ext>
+    </p:extLst>
+  </p:cSld>
+  <p:clrMapOvr>
+    <a:masterClrMapping/>
+  </p:clrMapOvr>
+</p:sld>
+</file>
+
+<file path=ppt/slides/slide6.xml><?xml version="1.0" encoding="utf-8"?>
+<p:sld xmlns:a="http://schemas.openxmlformats.org/drawingml/2006/main" xmlns:r="http://schemas.openxmlformats.org/officeDocument/2006/relationships" xmlns:p="http://schemas.openxmlformats.org/presentationml/2006/main">
+  <p:cSld>
+    <p:spTree>
+      <p:nvGrpSpPr>
+        <p:cNvPr id="1" name="">
+          <a:extLst>
+            <a:ext uri="{FF2B5EF4-FFF2-40B4-BE49-F238E27FC236}">
+              <a16:creationId xmlns:a16="http://schemas.microsoft.com/office/drawing/2014/main" id="{8E0CFA1D-7C75-9F39-5BE7-7A048F752D5B}"/>
+            </a:ext>
+          </a:extLst>
+        </p:cNvPr>
+        <p:cNvGrpSpPr/>
+        <p:nvPr/>
+      </p:nvGrpSpPr>
+      <p:grpSpPr>
+        <a:xfrm>
+          <a:off x="0" y="0"/>
+          <a:ext cx="0" cy="0"/>
+          <a:chOff x="0" y="0"/>
+          <a:chExt cx="0" cy="0"/>
+        </a:xfrm>
+      </p:grpSpPr>
+      <p:sp>
+        <p:nvSpPr>
+          <p:cNvPr id="3" name="TextBox 2">
+            <a:extLst>
+              <a:ext uri="{FF2B5EF4-FFF2-40B4-BE49-F238E27FC236}">
+                <a16:creationId xmlns:a16="http://schemas.microsoft.com/office/drawing/2014/main" id="{828188EE-E2D4-6C33-0380-5195A9691C16}"/>
+              </a:ext>
+            </a:extLst>
+          </p:cNvPr>
+          <p:cNvSpPr txBox="1"/>
+          <p:nvPr/>
+        </p:nvSpPr>
+        <p:spPr>
+          <a:xfrm>
+            <a:off x="217714" y="255046"/>
+            <a:ext cx="11756571" cy="355354"/>
+          </a:xfrm>
+          <a:prstGeom prst="rect">
+            <a:avLst/>
+          </a:prstGeom>
+          <a:noFill/>
+        </p:spPr>
+        <p:txBody>
+          <a:bodyPr wrap="square">
+            <a:spAutoFit/>
+          </a:bodyPr>
+          <a:lstStyle/>
+          <a:p>
+            <a:pPr>
+              <a:lnSpc>
+                <a:spcPct val="150000"/>
+              </a:lnSpc>
+              <a:buNone/>
+            </a:pPr>
+            <a:r>
               <a:rPr kumimoji="0" lang="en-US" altLang="en-US" sz="1300" b="0" i="0" u="none" strike="noStrike" cap="none" normalizeH="0" baseline="0">
                 <a:ln>
                   <a:noFill/>
@@ -3556,10 +4151,140 @@
           </a:p>
         </p:txBody>
       </p:sp>
+      <p:pic>
+        <p:nvPicPr>
+          <p:cNvPr id="4" name="Picture 3">
+            <a:extLst>
+              <a:ext uri="{FF2B5EF4-FFF2-40B4-BE49-F238E27FC236}">
+                <a16:creationId xmlns:a16="http://schemas.microsoft.com/office/drawing/2014/main" id="{C52DA1D6-8234-3702-6142-6522E44AA855}"/>
+              </a:ext>
+            </a:extLst>
+          </p:cNvPr>
+          <p:cNvPicPr>
+            <a:picLocks noChangeAspect="1"/>
+          </p:cNvPicPr>
+          <p:nvPr/>
+        </p:nvPicPr>
+        <p:blipFill>
+          <a:blip r:embed="rId2"/>
+          <a:stretch>
+            <a:fillRect/>
+          </a:stretch>
+        </p:blipFill>
+        <p:spPr>
+          <a:xfrm>
+            <a:off x="0" y="3024957"/>
+            <a:ext cx="12192000" cy="3833043"/>
+          </a:xfrm>
+          <a:prstGeom prst="rect">
+            <a:avLst/>
+          </a:prstGeom>
+          <a:ln w="38100" cap="sq">
+            <a:solidFill>
+              <a:srgbClr val="000000"/>
+            </a:solidFill>
+            <a:prstDash val="solid"/>
+            <a:miter lim="800000"/>
+          </a:ln>
+          <a:effectLst>
+            <a:outerShdw blurRad="50800" dist="38100" dir="2700000" algn="tl" rotWithShape="0">
+              <a:srgbClr val="000000">
+                <a:alpha val="43000"/>
+              </a:srgbClr>
+            </a:outerShdw>
+          </a:effectLst>
+        </p:spPr>
+      </p:pic>
     </p:spTree>
     <p:extLst>
       <p:ext uri="{BB962C8B-B14F-4D97-AF65-F5344CB8AC3E}">
-        <p14:creationId xmlns:p14="http://schemas.microsoft.com/office/powerpoint/2010/main" val="3095838342"/>
+        <p14:creationId xmlns:p14="http://schemas.microsoft.com/office/powerpoint/2010/main" val="95430474"/>
+      </p:ext>
+    </p:extLst>
+  </p:cSld>
+  <p:clrMapOvr>
+    <a:masterClrMapping/>
+  </p:clrMapOvr>
+</p:sld>
+</file>
+
+<file path=ppt/slides/slide7.xml><?xml version="1.0" encoding="utf-8"?>
+<p:sld xmlns:a="http://schemas.openxmlformats.org/drawingml/2006/main" xmlns:r="http://schemas.openxmlformats.org/officeDocument/2006/relationships" xmlns:p="http://schemas.openxmlformats.org/presentationml/2006/main">
+  <p:cSld>
+    <p:spTree>
+      <p:nvGrpSpPr>
+        <p:cNvPr id="1" name="">
+          <a:extLst>
+            <a:ext uri="{FF2B5EF4-FFF2-40B4-BE49-F238E27FC236}">
+              <a16:creationId xmlns:a16="http://schemas.microsoft.com/office/drawing/2014/main" id="{32848265-93BE-7195-AC7B-15C3F3EC85BA}"/>
+            </a:ext>
+          </a:extLst>
+        </p:cNvPr>
+        <p:cNvGrpSpPr/>
+        <p:nvPr/>
+      </p:nvGrpSpPr>
+      <p:grpSpPr>
+        <a:xfrm>
+          <a:off x="0" y="0"/>
+          <a:ext cx="0" cy="0"/>
+          <a:chOff x="0" y="0"/>
+          <a:chExt cx="0" cy="0"/>
+        </a:xfrm>
+      </p:grpSpPr>
+      <p:sp>
+        <p:nvSpPr>
+          <p:cNvPr id="3" name="TextBox 2">
+            <a:extLst>
+              <a:ext uri="{FF2B5EF4-FFF2-40B4-BE49-F238E27FC236}">
+                <a16:creationId xmlns:a16="http://schemas.microsoft.com/office/drawing/2014/main" id="{DCEECC70-CD22-3344-C66B-65D41DE32790}"/>
+              </a:ext>
+            </a:extLst>
+          </p:cNvPr>
+          <p:cNvSpPr txBox="1"/>
+          <p:nvPr/>
+        </p:nvSpPr>
+        <p:spPr>
+          <a:xfrm>
+            <a:off x="217714" y="255046"/>
+            <a:ext cx="11756571" cy="355354"/>
+          </a:xfrm>
+          <a:prstGeom prst="rect">
+            <a:avLst/>
+          </a:prstGeom>
+          <a:noFill/>
+        </p:spPr>
+        <p:txBody>
+          <a:bodyPr wrap="square">
+            <a:spAutoFit/>
+          </a:bodyPr>
+          <a:lstStyle/>
+          <a:p>
+            <a:pPr>
+              <a:lnSpc>
+                <a:spcPct val="150000"/>
+              </a:lnSpc>
+              <a:buNone/>
+            </a:pPr>
+            <a:r>
+              <a:rPr kumimoji="0" lang="en-US" altLang="en-US" sz="1300" b="0" i="0" u="none" strike="noStrike" cap="none" normalizeH="0" baseline="0">
+                <a:ln>
+                  <a:noFill/>
+                </a:ln>
+                <a:solidFill>
+                  <a:schemeClr val="tx1"/>
+                </a:solidFill>
+                <a:effectLst/>
+                <a:latin typeface="Arial" panose="020B0604020202020204" pitchFamily="34" charset="0"/>
+              </a:rPr>
+              <a:t>.</a:t>
+            </a:r>
+          </a:p>
+        </p:txBody>
+      </p:sp>
+    </p:spTree>
+    <p:extLst>
+      <p:ext uri="{BB962C8B-B14F-4D97-AF65-F5344CB8AC3E}">
+        <p14:creationId xmlns:p14="http://schemas.microsoft.com/office/powerpoint/2010/main" val="3733695255"/>
       </p:ext>
     </p:extLst>
   </p:cSld>

--- a/.lessons/56 Category, Subcategory and Child Category Setup/4 Category- Show data in index page/1.pptx
+++ b/.lessons/56 Category, Subcategory and Child Category Setup/4 Category- Show data in index page/1.pptx
@@ -3991,7 +3991,7 @@
         <p:spPr>
           <a:xfrm>
             <a:off x="217714" y="255046"/>
-            <a:ext cx="11756571" cy="355354"/>
+            <a:ext cx="3578431" cy="355354"/>
           </a:xfrm>
           <a:prstGeom prst="rect">
             <a:avLst/>
@@ -4037,10 +4037,10 @@
       </p:sp>
       <p:pic>
         <p:nvPicPr>
-          <p:cNvPr id="4" name="Picture 3">
-            <a:extLst>
-              <a:ext uri="{FF2B5EF4-FFF2-40B4-BE49-F238E27FC236}">
-                <a16:creationId xmlns:a16="http://schemas.microsoft.com/office/drawing/2014/main" id="{C97F3D0E-6013-47B3-1FB9-8DACD8107BC1}"/>
+          <p:cNvPr id="5" name="Picture 4">
+            <a:extLst>
+              <a:ext uri="{FF2B5EF4-FFF2-40B4-BE49-F238E27FC236}">
+                <a16:creationId xmlns:a16="http://schemas.microsoft.com/office/drawing/2014/main" id="{15E650DD-EFC1-F413-8EE1-1DA5FDA614A3}"/>
               </a:ext>
             </a:extLst>
           </p:cNvPr>
@@ -4057,8 +4057,8 @@
         </p:blipFill>
         <p:spPr>
           <a:xfrm>
-            <a:off x="5560088" y="0"/>
-            <a:ext cx="6631912" cy="6858000"/>
+            <a:off x="3912973" y="0"/>
+            <a:ext cx="8279027" cy="6858000"/>
           </a:xfrm>
           <a:prstGeom prst="rect">
             <a:avLst/>
